--- a/docs/report/校园二手图书交易平台 - 项目结项答辩.pptx
+++ b/docs/report/校园二手图书交易平台 - 项目结项答辩.pptx
@@ -121,7 +121,7 @@
   <p:extLst>
     <p:ext uri="{EFAFB233-063F-42B5-8137-9DF3F51BA10A}">
       <p15:sldGuideLst xmlns:p15="http://schemas.microsoft.com/office/powerpoint/2012/main">
-        <p15:guide id="1" orient="horz" pos="2164" userDrawn="1">
+        <p15:guide id="1" orient="horz" pos="2160" userDrawn="1">
           <p15:clr>
             <a:srgbClr val="A4A3A4"/>
           </p15:clr>
@@ -3106,126 +3106,10 @@
             <a:tailEnd type="none"/>
           </a:ln>
         </p:spPr>
-      </p:sp>
-      <p:sp>
-        <p:nvSpPr>
-          <p:cNvPr id="3" name="AutoShape 3"/>
-          <p:cNvSpPr/>
-          <p:nvPr/>
-        </p:nvSpPr>
-        <p:spPr>
-          <a:xfrm>
-            <a:off x="0" y="0"/>
-            <a:ext cx="12188952" cy="6858000"/>
-          </a:xfrm>
-          <a:prstGeom prst="rect">
-            <a:avLst/>
-          </a:prstGeom>
-          <a:blipFill rotWithShape="1">
-            <a:blip r:embed="rId1">
-              <a:alphaModFix amt="100000"/>
-              <a:alphaModFix amt="100000"/>
-            </a:blip>
-            <a:stretch>
-              <a:fillRect/>
-            </a:stretch>
-          </a:blipFill>
-          <a:ln>
-            <a:headEnd type="none"/>
-            <a:tailEnd type="none"/>
-          </a:ln>
-        </p:spPr>
-      </p:sp>
-      <p:sp>
-        <p:nvSpPr>
-          <p:cNvPr id="4" name="AutoShape 4"/>
-          <p:cNvSpPr/>
-          <p:nvPr/>
-        </p:nvSpPr>
-        <p:spPr>
-          <a:xfrm>
-            <a:off x="0" y="0"/>
-            <a:ext cx="12188952" cy="6858000"/>
-          </a:xfrm>
-          <a:prstGeom prst="rect">
-            <a:avLst/>
-          </a:prstGeom>
-          <a:solidFill>
-            <a:srgbClr val="0A1F3D">
-              <a:alpha val="65098"/>
-            </a:srgbClr>
-          </a:solidFill>
-          <a:ln>
-            <a:headEnd type="none"/>
-            <a:tailEnd type="none"/>
-          </a:ln>
-        </p:spPr>
-      </p:sp>
-      <p:sp>
-        <p:nvSpPr>
-          <p:cNvPr id="5" name="AutoShape 5"/>
-          <p:cNvSpPr/>
-          <p:nvPr/>
-        </p:nvSpPr>
-        <p:spPr>
-          <a:xfrm>
-            <a:off x="609448" y="700088"/>
-            <a:ext cx="228543" cy="19050"/>
-          </a:xfrm>
-          <a:prstGeom prst="rect">
-            <a:avLst/>
-          </a:prstGeom>
-          <a:solidFill>
-            <a:srgbClr val="5B8CB8">
-              <a:alpha val="100000"/>
-            </a:srgbClr>
-          </a:solidFill>
-          <a:ln>
-            <a:headEnd type="none"/>
-            <a:tailEnd type="none"/>
-          </a:ln>
-        </p:spPr>
-      </p:sp>
-      <p:sp>
-        <p:nvSpPr>
-          <p:cNvPr id="6" name="TextBox 6"/>
-          <p:cNvSpPr txBox="1"/>
-          <p:nvPr/>
-        </p:nvSpPr>
-        <p:spPr>
-          <a:xfrm>
-            <a:off x="952261" y="628650"/>
-            <a:ext cx="2058224" cy="152400"/>
-          </a:xfrm>
-          <a:prstGeom prst="rect">
-            <a:avLst/>
-          </a:prstGeom>
-          <a:ln>
-            <a:headEnd type="none"/>
-            <a:tailEnd type="none"/>
-          </a:ln>
-        </p:spPr>
         <p:txBody>
-          <a:bodyPr vert="horz" wrap="square" lIns="0" tIns="0" rIns="0" bIns="0" rtlCol="0" anchor="t" anchorCtr="0"/>
-          <a:lstStyle/>
-          <a:p>
-            <a:pPr algn="l">
-              <a:defRPr/>
-            </a:pPr>
-            <a:r>
-              <a:rPr lang="en-US" sz="1000" b="0" i="0" strike="noStrike">
-                <a:solidFill>
-                  <a:srgbClr val="F1F3F5">
-                    <a:alpha val="100000"/>
-                  </a:srgbClr>
-                </a:solidFill>
-                <a:latin typeface="Inter"/>
-                <a:ea typeface="Inter"/>
-                <a:cs typeface="Inter"/>
-              </a:rPr>
-              <a:t>Project Defense 2026</a:t>
-            </a:r>
-            <a:endParaRPr lang="en-US" sz="1100"/>
+          <a:bodyPr/>
+          <a:p>
+            <a:endParaRPr lang="zh-CN" altLang="en-US"/>
           </a:p>
         </p:txBody>
       </p:sp>
@@ -3336,161 +3220,6 @@
                 <a:cs typeface="Source Han Sans"/>
               </a:rPr>
               <a:t>计算机学院第 17 小组 · 项目结项答辩 · 2026 年 5 月</a:t>
-            </a:r>
-            <a:endParaRPr lang="en-US" sz="1100"/>
-          </a:p>
-        </p:txBody>
-      </p:sp>
-      <p:sp>
-        <p:nvSpPr>
-          <p:cNvPr id="9" name="AutoShape 9"/>
-          <p:cNvSpPr/>
-          <p:nvPr/>
-        </p:nvSpPr>
-        <p:spPr>
-          <a:xfrm>
-            <a:off x="609448" y="5600700"/>
-            <a:ext cx="10970057" cy="9525"/>
-          </a:xfrm>
-          <a:prstGeom prst="line">
-            <a:avLst/>
-          </a:prstGeom>
-          <a:ln w="9525">
-            <a:solidFill>
-              <a:srgbClr val="F1F3F5">
-                <a:alpha val="23921"/>
-              </a:srgbClr>
-            </a:solidFill>
-            <a:prstDash val="solid"/>
-            <a:headEnd type="none"/>
-            <a:tailEnd type="none"/>
-          </a:ln>
-        </p:spPr>
-      </p:sp>
-      <p:sp>
-        <p:nvSpPr>
-          <p:cNvPr id="10" name="TextBox 10"/>
-          <p:cNvSpPr txBox="1"/>
-          <p:nvPr/>
-        </p:nvSpPr>
-        <p:spPr>
-          <a:xfrm>
-            <a:off x="609448" y="5857875"/>
-            <a:ext cx="2585688" cy="142875"/>
-          </a:xfrm>
-          <a:prstGeom prst="rect">
-            <a:avLst/>
-          </a:prstGeom>
-          <a:ln>
-            <a:headEnd type="none"/>
-            <a:tailEnd type="none"/>
-          </a:ln>
-        </p:spPr>
-        <p:txBody>
-          <a:bodyPr vert="horz" wrap="square" lIns="0" tIns="0" rIns="0" bIns="0" rtlCol="0" anchor="t" anchorCtr="0"/>
-          <a:lstStyle/>
-          <a:p>
-            <a:pPr algn="l">
-              <a:defRPr/>
-            </a:pPr>
-            <a:r>
-              <a:rPr lang="en-US" sz="900" b="1" i="0" strike="noStrike">
-                <a:solidFill>
-                  <a:srgbClr val="5B8CB8">
-                    <a:alpha val="100000"/>
-                  </a:srgbClr>
-                </a:solidFill>
-                <a:latin typeface="Inter"/>
-                <a:ea typeface="Inter"/>
-                <a:cs typeface="Inter"/>
-              </a:rPr>
-              <a:t>COMPUTER SCIENCE DEPT.</a:t>
-            </a:r>
-            <a:endParaRPr lang="en-US" sz="1100"/>
-          </a:p>
-        </p:txBody>
-      </p:sp>
-      <p:sp>
-        <p:nvSpPr>
-          <p:cNvPr id="11" name="TextBox 11"/>
-          <p:cNvSpPr txBox="1"/>
-          <p:nvPr/>
-        </p:nvSpPr>
-        <p:spPr>
-          <a:xfrm>
-            <a:off x="609448" y="6081712"/>
-            <a:ext cx="10970057" cy="142875"/>
-          </a:xfrm>
-          <a:prstGeom prst="rect">
-            <a:avLst/>
-          </a:prstGeom>
-          <a:ln>
-            <a:headEnd type="none"/>
-            <a:tailEnd type="none"/>
-          </a:ln>
-        </p:spPr>
-        <p:txBody>
-          <a:bodyPr vert="horz" wrap="square" lIns="0" tIns="0" rIns="0" bIns="0" rtlCol="0" anchor="t" anchorCtr="0"/>
-          <a:lstStyle/>
-          <a:p>
-            <a:pPr algn="l">
-              <a:defRPr/>
-            </a:pPr>
-            <a:r>
-              <a:rPr lang="en-US" sz="900" b="0" i="0" strike="noStrike">
-                <a:solidFill>
-                  <a:srgbClr val="F1F3F5">
-                    <a:alpha val="100000"/>
-                  </a:srgbClr>
-                </a:solidFill>
-                <a:latin typeface="Inter"/>
-                <a:ea typeface="Inter"/>
-                <a:cs typeface="Inter"/>
-              </a:rPr>
-              <a:t>School of Computer Science &amp; Technology</a:t>
-            </a:r>
-            <a:endParaRPr lang="en-US" sz="1100"/>
-          </a:p>
-        </p:txBody>
-      </p:sp>
-      <p:sp>
-        <p:nvSpPr>
-          <p:cNvPr id="12" name="TextBox 12"/>
-          <p:cNvSpPr txBox="1"/>
-          <p:nvPr/>
-        </p:nvSpPr>
-        <p:spPr>
-          <a:xfrm>
-            <a:off x="11200831" y="6081712"/>
-            <a:ext cx="407241" cy="142875"/>
-          </a:xfrm>
-          <a:prstGeom prst="rect">
-            <a:avLst/>
-          </a:prstGeom>
-          <a:ln>
-            <a:headEnd type="none"/>
-            <a:tailEnd type="none"/>
-          </a:ln>
-        </p:spPr>
-        <p:txBody>
-          <a:bodyPr vert="horz" wrap="square" lIns="0" tIns="0" rIns="0" bIns="0" rtlCol="0" anchor="t" anchorCtr="0"/>
-          <a:lstStyle/>
-          <a:p>
-            <a:pPr algn="l">
-              <a:defRPr/>
-            </a:pPr>
-            <a:r>
-              <a:rPr lang="en-US" sz="900" b="1" i="0" strike="noStrike">
-                <a:solidFill>
-                  <a:srgbClr val="F1F3F5">
-                    <a:alpha val="100000"/>
-                  </a:srgbClr>
-                </a:solidFill>
-                <a:latin typeface="Inter"/>
-                <a:ea typeface="Inter"/>
-                <a:cs typeface="Inter"/>
-              </a:rPr>
-              <a:t>01 / 12</a:t>
             </a:r>
             <a:endParaRPr lang="en-US" sz="1100"/>
           </a:p>
@@ -6354,49 +6083,6 @@
             <a:tailEnd type="none"/>
           </a:ln>
         </p:spPr>
-      </p:sp>
-      <p:sp>
-        <p:nvSpPr>
-          <p:cNvPr id="38" name="TextBox 38"/>
-          <p:cNvSpPr txBox="1"/>
-          <p:nvPr/>
-        </p:nvSpPr>
-        <p:spPr>
-          <a:xfrm>
-            <a:off x="457086" y="6248400"/>
-            <a:ext cx="885753" cy="133350"/>
-          </a:xfrm>
-          <a:prstGeom prst="rect">
-            <a:avLst/>
-          </a:prstGeom>
-          <a:ln>
-            <a:headEnd type="none"/>
-            <a:tailEnd type="none"/>
-          </a:ln>
-        </p:spPr>
-        <p:txBody>
-          <a:bodyPr vert="horz" wrap="square" lIns="0" tIns="0" rIns="0" bIns="0" rtlCol="0" anchor="t" anchorCtr="0"/>
-          <a:lstStyle/>
-          <a:p>
-            <a:pPr algn="l">
-              <a:defRPr/>
-            </a:pPr>
-            <a:r>
-              <a:rPr lang="en-US" sz="900" b="0" i="0" strike="noStrike">
-                <a:solidFill>
-                  <a:srgbClr val="0A1F3D">
-                    <a:alpha val="60000"/>
-                  </a:srgbClr>
-                </a:solidFill>
-                <a:latin typeface="Inter"/>
-                <a:ea typeface="Inter"/>
-                <a:cs typeface="Inter"/>
-              </a:rPr>
-              <a:t>非功能设计 · 10</a:t>
-            </a:r>
-            <a:endParaRPr lang="en-US" sz="1100"/>
-          </a:p>
-        </p:txBody>
       </p:sp>
       <p:sp>
         <p:nvSpPr>
@@ -10952,49 +10638,6 @@
       </p:sp>
       <p:sp>
         <p:nvSpPr>
-          <p:cNvPr id="37" name="TextBox 37"/>
-          <p:cNvSpPr txBox="1"/>
-          <p:nvPr/>
-        </p:nvSpPr>
-        <p:spPr>
-          <a:xfrm>
-            <a:off x="457086" y="6248400"/>
-            <a:ext cx="828617" cy="133350"/>
-          </a:xfrm>
-          <a:prstGeom prst="rect">
-            <a:avLst/>
-          </a:prstGeom>
-          <a:ln>
-            <a:headEnd type="none"/>
-            <a:tailEnd type="none"/>
-          </a:ln>
-        </p:spPr>
-        <p:txBody>
-          <a:bodyPr vert="horz" wrap="square" lIns="0" tIns="0" rIns="0" bIns="0" rtlCol="0" anchor="t" anchorCtr="0"/>
-          <a:lstStyle/>
-          <a:p>
-            <a:pPr algn="l">
-              <a:defRPr/>
-            </a:pPr>
-            <a:r>
-              <a:rPr lang="en-US" sz="900" b="0" i="0" strike="noStrike">
-                <a:solidFill>
-                  <a:srgbClr val="0A1F3D">
-                    <a:alpha val="100000"/>
-                  </a:srgbClr>
-                </a:solidFill>
-                <a:latin typeface="Inter"/>
-                <a:ea typeface="Inter"/>
-                <a:cs typeface="Inter"/>
-              </a:rPr>
-              <a:t>问题与改进 · 12</a:t>
-            </a:r>
-            <a:endParaRPr lang="en-US" sz="1100"/>
-          </a:p>
-        </p:txBody>
-      </p:sp>
-      <p:sp>
-        <p:nvSpPr>
           <p:cNvPr id="38" name="TextBox 38"/>
           <p:cNvSpPr txBox="1"/>
           <p:nvPr/>
@@ -13559,49 +13202,6 @@
       </p:sp>
       <p:sp>
         <p:nvSpPr>
-          <p:cNvPr id="35" name="TextBox 35"/>
-          <p:cNvSpPr txBox="1"/>
-          <p:nvPr/>
-        </p:nvSpPr>
-        <p:spPr>
-          <a:xfrm>
-            <a:off x="457086" y="6248400"/>
-            <a:ext cx="765827" cy="133350"/>
-          </a:xfrm>
-          <a:prstGeom prst="rect">
-            <a:avLst/>
-          </a:prstGeom>
-          <a:ln>
-            <a:headEnd type="none"/>
-            <a:tailEnd type="none"/>
-          </a:ln>
-        </p:spPr>
-        <p:txBody>
-          <a:bodyPr vert="horz" wrap="square" lIns="0" tIns="0" rIns="0" bIns="0" rtlCol="0" anchor="t" anchorCtr="0"/>
-          <a:lstStyle/>
-          <a:p>
-            <a:pPr algn="l">
-              <a:defRPr/>
-            </a:pPr>
-            <a:r>
-              <a:rPr lang="en-US" sz="900" b="0" i="0" strike="noStrike">
-                <a:solidFill>
-                  <a:srgbClr val="0A1F3D">
-                    <a:alpha val="100000"/>
-                  </a:srgbClr>
-                </a:solidFill>
-                <a:latin typeface="Inter"/>
-                <a:ea typeface="Inter"/>
-                <a:cs typeface="Inter"/>
-              </a:rPr>
-              <a:t>项目总结 · 13</a:t>
-            </a:r>
-            <a:endParaRPr lang="en-US" sz="1100"/>
-          </a:p>
-        </p:txBody>
-      </p:sp>
-      <p:sp>
-        <p:nvSpPr>
           <p:cNvPr id="36" name="TextBox 36"/>
           <p:cNvSpPr txBox="1"/>
           <p:nvPr/>
@@ -16476,60 +16076,6 @@
       </p:sp>
       <p:sp>
         <p:nvSpPr>
-          <p:cNvPr id="3" name="AutoShape 3"/>
-          <p:cNvSpPr/>
-          <p:nvPr/>
-        </p:nvSpPr>
-        <p:spPr>
-          <a:xfrm>
-            <a:off x="0" y="0"/>
-            <a:ext cx="12188952" cy="6858000"/>
-          </a:xfrm>
-          <a:prstGeom prst="rect">
-            <a:avLst/>
-          </a:prstGeom>
-          <a:blipFill rotWithShape="1">
-            <a:blip r:embed="rId1">
-              <a:alphaModFix amt="100000"/>
-              <a:alphaModFix amt="100000"/>
-            </a:blip>
-            <a:stretch>
-              <a:fillRect/>
-            </a:stretch>
-          </a:blipFill>
-          <a:ln>
-            <a:headEnd type="none"/>
-            <a:tailEnd type="none"/>
-          </a:ln>
-        </p:spPr>
-      </p:sp>
-      <p:sp>
-        <p:nvSpPr>
-          <p:cNvPr id="4" name="AutoShape 4"/>
-          <p:cNvSpPr/>
-          <p:nvPr/>
-        </p:nvSpPr>
-        <p:spPr>
-          <a:xfrm>
-            <a:off x="0" y="0"/>
-            <a:ext cx="12188952" cy="6858000"/>
-          </a:xfrm>
-          <a:prstGeom prst="rect">
-            <a:avLst/>
-          </a:prstGeom>
-          <a:solidFill>
-            <a:srgbClr val="0A1F3D">
-              <a:alpha val="65098"/>
-            </a:srgbClr>
-          </a:solidFill>
-          <a:ln>
-            <a:headEnd type="none"/>
-            <a:tailEnd type="none"/>
-          </a:ln>
-        </p:spPr>
-      </p:sp>
-      <p:sp>
-        <p:nvSpPr>
           <p:cNvPr id="5" name="TextBox 5"/>
           <p:cNvSpPr txBox="1"/>
           <p:nvPr/>
@@ -16695,49 +16241,6 @@
                 <a:cs typeface="Inter"/>
               </a:rPr>
               <a:t>项目结项答辩</a:t>
-            </a:r>
-            <a:endParaRPr lang="en-US" sz="1100"/>
-          </a:p>
-        </p:txBody>
-      </p:sp>
-      <p:sp>
-        <p:nvSpPr>
-          <p:cNvPr id="9" name="TextBox 9"/>
-          <p:cNvSpPr txBox="1"/>
-          <p:nvPr/>
-        </p:nvSpPr>
-        <p:spPr>
-          <a:xfrm>
-            <a:off x="11382356" y="6248400"/>
-            <a:ext cx="378078" cy="133350"/>
-          </a:xfrm>
-          <a:prstGeom prst="rect">
-            <a:avLst/>
-          </a:prstGeom>
-          <a:ln>
-            <a:headEnd type="none"/>
-            <a:tailEnd type="none"/>
-          </a:ln>
-        </p:spPr>
-        <p:txBody>
-          <a:bodyPr vert="horz" wrap="square" lIns="0" tIns="0" rIns="0" bIns="0" rtlCol="0" anchor="t" anchorCtr="0"/>
-          <a:lstStyle/>
-          <a:p>
-            <a:pPr algn="l">
-              <a:defRPr/>
-            </a:pPr>
-            <a:r>
-              <a:rPr lang="en-US" sz="900" b="0" i="0" strike="noStrike">
-                <a:solidFill>
-                  <a:srgbClr val="F1F3F5">
-                    <a:alpha val="100000"/>
-                  </a:srgbClr>
-                </a:solidFill>
-                <a:latin typeface="Inter"/>
-                <a:ea typeface="Inter"/>
-                <a:cs typeface="Inter"/>
-              </a:rPr>
-              <a:t>15 / 15</a:t>
             </a:r>
             <a:endParaRPr lang="en-US" sz="1100"/>
           </a:p>
@@ -17707,49 +17210,6 @@
       </p:sp>
       <p:sp>
         <p:nvSpPr>
-          <p:cNvPr id="27" name="TextBox 27"/>
-          <p:cNvSpPr txBox="1"/>
-          <p:nvPr/>
-        </p:nvSpPr>
-        <p:spPr>
-          <a:xfrm>
-            <a:off x="457086" y="6248400"/>
-            <a:ext cx="485803" cy="133350"/>
-          </a:xfrm>
-          <a:prstGeom prst="rect">
-            <a:avLst/>
-          </a:prstGeom>
-          <a:ln>
-            <a:headEnd type="none"/>
-            <a:tailEnd type="none"/>
-          </a:ln>
-        </p:spPr>
-        <p:txBody>
-          <a:bodyPr vert="horz" wrap="square" lIns="0" tIns="0" rIns="0" bIns="0" rtlCol="0" anchor="t" anchorCtr="0"/>
-          <a:lstStyle/>
-          <a:p>
-            <a:pPr algn="l">
-              <a:defRPr/>
-            </a:pPr>
-            <a:r>
-              <a:rPr lang="en-US" sz="900" b="0" i="0" strike="noStrike">
-                <a:solidFill>
-                  <a:srgbClr val="0A1F3D">
-                    <a:alpha val="100000"/>
-                  </a:srgbClr>
-                </a:solidFill>
-                <a:latin typeface="Inter"/>
-                <a:ea typeface="Inter"/>
-                <a:cs typeface="Inter"/>
-              </a:rPr>
-              <a:t>目录 · 02</a:t>
-            </a:r>
-            <a:endParaRPr lang="en-US" sz="1100"/>
-          </a:p>
-        </p:txBody>
-      </p:sp>
-      <p:sp>
-        <p:nvSpPr>
           <p:cNvPr id="28" name="TextBox 28"/>
           <p:cNvSpPr txBox="1"/>
           <p:nvPr/>
@@ -18900,49 +18360,6 @@
       </p:sp>
       <p:sp>
         <p:nvSpPr>
-          <p:cNvPr id="20" name="TextBox 20"/>
-          <p:cNvSpPr txBox="1"/>
-          <p:nvPr/>
-        </p:nvSpPr>
-        <p:spPr>
-          <a:xfrm>
-            <a:off x="457086" y="6248400"/>
-            <a:ext cx="1365752" cy="133350"/>
-          </a:xfrm>
-          <a:prstGeom prst="rect">
-            <a:avLst/>
-          </a:prstGeom>
-          <a:ln>
-            <a:headEnd type="none"/>
-            <a:tailEnd type="none"/>
-          </a:ln>
-        </p:spPr>
-        <p:txBody>
-          <a:bodyPr vert="horz" wrap="square" lIns="0" tIns="0" rIns="0" bIns="0" rtlCol="0" anchor="t" anchorCtr="0"/>
-          <a:lstStyle/>
-          <a:p>
-            <a:pPr algn="l">
-              <a:defRPr/>
-            </a:pPr>
-            <a:r>
-              <a:rPr lang="en-US" sz="900" b="0" i="0" strike="noStrike">
-                <a:solidFill>
-                  <a:srgbClr val="0A1F3D">
-                    <a:alpha val="100000"/>
-                  </a:srgbClr>
-                </a:solidFill>
-                <a:latin typeface="Inter"/>
-                <a:ea typeface="Inter"/>
-                <a:cs typeface="Inter"/>
-              </a:rPr>
-              <a:t>项目背景与核心目标 · 03</a:t>
-            </a:r>
-            <a:endParaRPr lang="en-US" sz="1100"/>
-          </a:p>
-        </p:txBody>
-      </p:sp>
-      <p:sp>
-        <p:nvSpPr>
           <p:cNvPr id="21" name="TextBox 21"/>
           <p:cNvSpPr txBox="1"/>
           <p:nvPr/>
@@ -23834,49 +23251,6 @@
             <a:tailEnd type="none"/>
           </a:ln>
         </p:spPr>
-      </p:sp>
-      <p:sp>
-        <p:nvSpPr>
-          <p:cNvPr id="13" name="TextBox 13"/>
-          <p:cNvSpPr txBox="1"/>
-          <p:nvPr/>
-        </p:nvSpPr>
-        <p:spPr>
-          <a:xfrm>
-            <a:off x="457086" y="6248400"/>
-            <a:ext cx="714346" cy="133350"/>
-          </a:xfrm>
-          <a:prstGeom prst="rect">
-            <a:avLst/>
-          </a:prstGeom>
-          <a:ln>
-            <a:headEnd type="none"/>
-            <a:tailEnd type="none"/>
-          </a:ln>
-        </p:spPr>
-        <p:txBody>
-          <a:bodyPr vert="horz" wrap="square" lIns="0" tIns="0" rIns="0" bIns="0" rtlCol="0" anchor="t" anchorCtr="0"/>
-          <a:lstStyle/>
-          <a:p>
-            <a:pPr algn="l">
-              <a:defRPr/>
-            </a:pPr>
-            <a:r>
-              <a:rPr lang="en-US" sz="900" b="0" i="0" strike="noStrike">
-                <a:solidFill>
-                  <a:srgbClr val="0A1F3D">
-                    <a:alpha val="100000"/>
-                  </a:srgbClr>
-                </a:solidFill>
-                <a:latin typeface="Inter"/>
-                <a:ea typeface="Inter"/>
-                <a:cs typeface="Inter"/>
-              </a:rPr>
-              <a:t>技术架构 · 05</a:t>
-            </a:r>
-            <a:endParaRPr lang="en-US" sz="1100"/>
-          </a:p>
-        </p:txBody>
       </p:sp>
       <p:sp>
         <p:nvSpPr>
@@ -25095,7 +24469,7 @@
         </p:nvSpPr>
         <p:spPr>
           <a:xfrm>
-            <a:off x="457086" y="2314575"/>
+            <a:off x="466611" y="2314575"/>
             <a:ext cx="5523120" cy="2600325"/>
           </a:xfrm>
           <a:prstGeom prst="rect">
@@ -34714,49 +34088,6 @@
             <a:tailEnd type="none"/>
           </a:ln>
         </p:spPr>
-      </p:sp>
-      <p:sp>
-        <p:nvSpPr>
-          <p:cNvPr id="36" name="TextBox 36"/>
-          <p:cNvSpPr txBox="1"/>
-          <p:nvPr/>
-        </p:nvSpPr>
-        <p:spPr>
-          <a:xfrm>
-            <a:off x="457086" y="6257925"/>
-            <a:ext cx="765827" cy="133350"/>
-          </a:xfrm>
-          <a:prstGeom prst="rect">
-            <a:avLst/>
-          </a:prstGeom>
-          <a:ln>
-            <a:headEnd type="none"/>
-            <a:tailEnd type="none"/>
-          </a:ln>
-        </p:spPr>
-        <p:txBody>
-          <a:bodyPr vert="horz" wrap="square" lIns="0" tIns="0" rIns="0" bIns="0" rtlCol="0" anchor="t" anchorCtr="0"/>
-          <a:lstStyle/>
-          <a:p>
-            <a:pPr algn="l">
-              <a:defRPr/>
-            </a:pPr>
-            <a:r>
-              <a:rPr lang="en-US" sz="900" b="0" i="0" strike="noStrike">
-                <a:solidFill>
-                  <a:srgbClr val="0A1F3D">
-                    <a:alpha val="100000"/>
-                  </a:srgbClr>
-                </a:solidFill>
-                <a:latin typeface="Poppins"/>
-                <a:ea typeface="Poppins"/>
-                <a:cs typeface="Poppins"/>
-              </a:rPr>
-              <a:t>核心功能 · 09</a:t>
-            </a:r>
-            <a:endParaRPr lang="en-US" sz="1100"/>
-          </a:p>
-        </p:txBody>
       </p:sp>
       <p:sp>
         <p:nvSpPr>
